--- a/1_JDK_Installation_env.pptx
+++ b/1_JDK_Installation_env.pptx
@@ -130,6 +130,35 @@
     </p:ext>
   </p:extLst>
 </p:presentation>
+</file>
+
+<file path=ppt/changesInfos/changesInfo1.xml><?xml version="1.0" encoding="utf-8"?>
+<pc:chgInfo xmlns:a="http://schemas.openxmlformats.org/drawingml/2006/main" xmlns:r="http://schemas.openxmlformats.org/officeDocument/2006/relationships" xmlns:ac="http://schemas.microsoft.com/office/drawing/2013/main/command" xmlns:pc="http://schemas.microsoft.com/office/powerpoint/2013/main/command">
+  <pc:docChgLst>
+    <pc:chgData name="vaishali Sonanis" userId="0daaaab4af2c05f1" providerId="LiveId" clId="{6697AB85-906A-4E89-B76B-0AA369ED93DE}"/>
+    <pc:docChg chg="modSld">
+      <pc:chgData name="vaishali Sonanis" userId="0daaaab4af2c05f1" providerId="LiveId" clId="{6697AB85-906A-4E89-B76B-0AA369ED93DE}" dt="2026-04-22T04:52:36.051" v="2" actId="6549"/>
+      <pc:docMkLst>
+        <pc:docMk/>
+      </pc:docMkLst>
+      <pc:sldChg chg="modSp mod">
+        <pc:chgData name="vaishali Sonanis" userId="0daaaab4af2c05f1" providerId="LiveId" clId="{6697AB85-906A-4E89-B76B-0AA369ED93DE}" dt="2026-04-22T04:52:36.051" v="2" actId="6549"/>
+        <pc:sldMkLst>
+          <pc:docMk/>
+          <pc:sldMk cId="0" sldId="256"/>
+        </pc:sldMkLst>
+        <pc:spChg chg="mod">
+          <ac:chgData name="vaishali Sonanis" userId="0daaaab4af2c05f1" providerId="LiveId" clId="{6697AB85-906A-4E89-B76B-0AA369ED93DE}" dt="2026-04-22T04:52:36.051" v="2" actId="6549"/>
+          <ac:spMkLst>
+            <pc:docMk/>
+            <pc:sldMk cId="0" sldId="256"/>
+            <ac:spMk id="3" creationId="{00000000-0000-0000-0000-000000000000}"/>
+          </ac:spMkLst>
+        </pc:spChg>
+      </pc:sldChg>
+    </pc:docChg>
+  </pc:docChgLst>
+</pc:chgInfo>
 </file>
 
 <file path=ppt/diagrams/colors1.xml><?xml version="1.0" encoding="utf-8"?>
@@ -3071,7 +3100,7 @@
           <a:noFill/>
           <a:extLst>
             <a:ext uri="{909E8E84-426E-40dd-AFC4-6F175D3DCCD1}">
-              <a14:hiddenFill xmlns="" xmlns:a14="http://schemas.microsoft.com/office/drawing/2010/main">
+              <a14:hiddenFill xmlns:a14="http://schemas.microsoft.com/office/drawing/2010/main" xmlns="">
                 <a:solidFill>
                   <a:srgbClr val="FFFFFF"/>
                 </a:solidFill>
@@ -3131,7 +3160,7 @@
             </a:ln>
             <a:extLst>
               <a:ext uri="{91240B29-F687-4f45-9708-019B960494DF}">
-                <a14:hiddenLine xmlns="" xmlns:a14="http://schemas.microsoft.com/office/drawing/2010/main" w="9525">
+                <a14:hiddenLine xmlns:a14="http://schemas.microsoft.com/office/drawing/2010/main" xmlns="" w="9525">
                   <a:solidFill>
                     <a:srgbClr val="000000"/>
                   </a:solidFill>
@@ -3142,6 +3171,13 @@
               </a:ext>
             </a:extLst>
           </p:spPr>
+          <p:txBody>
+            <a:bodyPr/>
+            <a:lstStyle/>
+            <a:p>
+              <a:endParaRPr lang="en-IN"/>
+            </a:p>
+          </p:txBody>
         </p:sp>
         <p:sp>
           <p:nvSpPr>
@@ -3221,7 +3257,7 @@
             </a:ln>
             <a:extLst>
               <a:ext uri="{91240B29-F687-4f45-9708-019B960494DF}">
-                <a14:hiddenLine xmlns="" xmlns:a14="http://schemas.microsoft.com/office/drawing/2010/main" w="9525">
+                <a14:hiddenLine xmlns:a14="http://schemas.microsoft.com/office/drawing/2010/main" xmlns="" w="9525">
                   <a:solidFill>
                     <a:srgbClr val="000000"/>
                   </a:solidFill>
@@ -3232,6 +3268,13 @@
               </a:ext>
             </a:extLst>
           </p:spPr>
+          <p:txBody>
+            <a:bodyPr/>
+            <a:lstStyle/>
+            <a:p>
+              <a:endParaRPr lang="en-IN"/>
+            </a:p>
+          </p:txBody>
         </p:sp>
         <p:sp>
           <p:nvSpPr>
@@ -3311,7 +3354,7 @@
             </a:ln>
             <a:extLst>
               <a:ext uri="{91240B29-F687-4f45-9708-019B960494DF}">
-                <a14:hiddenLine xmlns="" xmlns:a14="http://schemas.microsoft.com/office/drawing/2010/main" w="9525">
+                <a14:hiddenLine xmlns:a14="http://schemas.microsoft.com/office/drawing/2010/main" xmlns="" w="9525">
                   <a:solidFill>
                     <a:srgbClr val="000000"/>
                   </a:solidFill>
@@ -3322,6 +3365,13 @@
               </a:ext>
             </a:extLst>
           </p:spPr>
+          <p:txBody>
+            <a:bodyPr/>
+            <a:lstStyle/>
+            <a:p>
+              <a:endParaRPr lang="en-IN"/>
+            </a:p>
+          </p:txBody>
         </p:sp>
         <p:sp>
           <p:nvSpPr>
@@ -3345,7 +3395,7 @@
             </a:ln>
             <a:extLst>
               <a:ext uri="{91240B29-F687-4f45-9708-019B960494DF}">
-                <a14:hiddenLine xmlns="" xmlns:a14="http://schemas.microsoft.com/office/drawing/2010/main" w="9525">
+                <a14:hiddenLine xmlns:a14="http://schemas.microsoft.com/office/drawing/2010/main" xmlns="" w="9525">
                   <a:solidFill>
                     <a:srgbClr val="000000"/>
                   </a:solidFill>
@@ -3356,6 +3406,13 @@
               </a:ext>
             </a:extLst>
           </p:spPr>
+          <p:txBody>
+            <a:bodyPr/>
+            <a:lstStyle/>
+            <a:p>
+              <a:endParaRPr lang="en-IN"/>
+            </a:p>
+          </p:txBody>
         </p:sp>
         <p:sp>
           <p:nvSpPr>
@@ -3435,7 +3492,7 @@
             </a:ln>
             <a:extLst>
               <a:ext uri="{91240B29-F687-4f45-9708-019B960494DF}">
-                <a14:hiddenLine xmlns="" xmlns:a14="http://schemas.microsoft.com/office/drawing/2010/main" w="9525">
+                <a14:hiddenLine xmlns:a14="http://schemas.microsoft.com/office/drawing/2010/main" xmlns="" w="9525">
                   <a:solidFill>
                     <a:srgbClr val="000000"/>
                   </a:solidFill>
@@ -3446,6 +3503,13 @@
               </a:ext>
             </a:extLst>
           </p:spPr>
+          <p:txBody>
+            <a:bodyPr/>
+            <a:lstStyle/>
+            <a:p>
+              <a:endParaRPr lang="en-IN"/>
+            </a:p>
+          </p:txBody>
         </p:sp>
         <p:sp>
           <p:nvSpPr>
@@ -3497,7 +3561,7 @@
             </a:ln>
             <a:extLst>
               <a:ext uri="{91240B29-F687-4f45-9708-019B960494DF}">
-                <a14:hiddenLine xmlns="" xmlns:a14="http://schemas.microsoft.com/office/drawing/2010/main" w="9525">
+                <a14:hiddenLine xmlns:a14="http://schemas.microsoft.com/office/drawing/2010/main" xmlns="" w="9525">
                   <a:solidFill>
                     <a:srgbClr val="000000"/>
                   </a:solidFill>
@@ -3508,6 +3572,13 @@
               </a:ext>
             </a:extLst>
           </p:spPr>
+          <p:txBody>
+            <a:bodyPr/>
+            <a:lstStyle/>
+            <a:p>
+              <a:endParaRPr lang="en-IN"/>
+            </a:p>
+          </p:txBody>
         </p:sp>
         <p:sp>
           <p:nvSpPr>
@@ -3559,7 +3630,7 @@
             </a:ln>
             <a:extLst>
               <a:ext uri="{91240B29-F687-4f45-9708-019B960494DF}">
-                <a14:hiddenLine xmlns="" xmlns:a14="http://schemas.microsoft.com/office/drawing/2010/main" w="9525">
+                <a14:hiddenLine xmlns:a14="http://schemas.microsoft.com/office/drawing/2010/main" xmlns="" w="9525">
                   <a:solidFill>
                     <a:srgbClr val="000000"/>
                   </a:solidFill>
@@ -3570,6 +3641,13 @@
               </a:ext>
             </a:extLst>
           </p:spPr>
+          <p:txBody>
+            <a:bodyPr/>
+            <a:lstStyle/>
+            <a:p>
+              <a:endParaRPr lang="en-IN"/>
+            </a:p>
+          </p:txBody>
         </p:sp>
         <p:sp>
           <p:nvSpPr>
@@ -3649,7 +3727,7 @@
             </a:ln>
             <a:extLst>
               <a:ext uri="{91240B29-F687-4f45-9708-019B960494DF}">
-                <a14:hiddenLine xmlns="" xmlns:a14="http://schemas.microsoft.com/office/drawing/2010/main" w="9525">
+                <a14:hiddenLine xmlns:a14="http://schemas.microsoft.com/office/drawing/2010/main" xmlns="" w="9525">
                   <a:solidFill>
                     <a:srgbClr val="000000"/>
                   </a:solidFill>
@@ -3660,6 +3738,13 @@
               </a:ext>
             </a:extLst>
           </p:spPr>
+          <p:txBody>
+            <a:bodyPr/>
+            <a:lstStyle/>
+            <a:p>
+              <a:endParaRPr lang="en-IN"/>
+            </a:p>
+          </p:txBody>
         </p:sp>
         <p:sp>
           <p:nvSpPr>
@@ -3711,7 +3796,7 @@
             </a:ln>
             <a:extLst>
               <a:ext uri="{91240B29-F687-4f45-9708-019B960494DF}">
-                <a14:hiddenLine xmlns="" xmlns:a14="http://schemas.microsoft.com/office/drawing/2010/main" w="9525">
+                <a14:hiddenLine xmlns:a14="http://schemas.microsoft.com/office/drawing/2010/main" xmlns="" w="9525">
                   <a:solidFill>
                     <a:srgbClr val="000000"/>
                   </a:solidFill>
@@ -3722,6 +3807,13 @@
               </a:ext>
             </a:extLst>
           </p:spPr>
+          <p:txBody>
+            <a:bodyPr/>
+            <a:lstStyle/>
+            <a:p>
+              <a:endParaRPr lang="en-IN"/>
+            </a:p>
+          </p:txBody>
         </p:sp>
         <p:sp>
           <p:nvSpPr>
@@ -3773,7 +3865,7 @@
             </a:ln>
             <a:extLst>
               <a:ext uri="{91240B29-F687-4f45-9708-019B960494DF}">
-                <a14:hiddenLine xmlns="" xmlns:a14="http://schemas.microsoft.com/office/drawing/2010/main" w="9525">
+                <a14:hiddenLine xmlns:a14="http://schemas.microsoft.com/office/drawing/2010/main" xmlns="" w="9525">
                   <a:solidFill>
                     <a:srgbClr val="000000"/>
                   </a:solidFill>
@@ -3784,6 +3876,13 @@
               </a:ext>
             </a:extLst>
           </p:spPr>
+          <p:txBody>
+            <a:bodyPr/>
+            <a:lstStyle/>
+            <a:p>
+              <a:endParaRPr lang="en-IN"/>
+            </a:p>
+          </p:txBody>
         </p:sp>
         <p:sp>
           <p:nvSpPr>
@@ -3863,7 +3962,7 @@
             </a:ln>
             <a:extLst>
               <a:ext uri="{91240B29-F687-4f45-9708-019B960494DF}">
-                <a14:hiddenLine xmlns="" xmlns:a14="http://schemas.microsoft.com/office/drawing/2010/main" w="9525">
+                <a14:hiddenLine xmlns:a14="http://schemas.microsoft.com/office/drawing/2010/main" xmlns="" w="9525">
                   <a:solidFill>
                     <a:srgbClr val="000000"/>
                   </a:solidFill>
@@ -3874,6 +3973,13 @@
               </a:ext>
             </a:extLst>
           </p:spPr>
+          <p:txBody>
+            <a:bodyPr/>
+            <a:lstStyle/>
+            <a:p>
+              <a:endParaRPr lang="en-IN"/>
+            </a:p>
+          </p:txBody>
         </p:sp>
         <p:sp>
           <p:nvSpPr>
@@ -3953,7 +4059,7 @@
             </a:ln>
             <a:extLst>
               <a:ext uri="{91240B29-F687-4f45-9708-019B960494DF}">
-                <a14:hiddenLine xmlns="" xmlns:a14="http://schemas.microsoft.com/office/drawing/2010/main" w="9525">
+                <a14:hiddenLine xmlns:a14="http://schemas.microsoft.com/office/drawing/2010/main" xmlns="" w="9525">
                   <a:solidFill>
                     <a:srgbClr val="000000"/>
                   </a:solidFill>
@@ -3964,6 +4070,13 @@
               </a:ext>
             </a:extLst>
           </p:spPr>
+          <p:txBody>
+            <a:bodyPr/>
+            <a:lstStyle/>
+            <a:p>
+              <a:endParaRPr lang="en-IN"/>
+            </a:p>
+          </p:txBody>
         </p:sp>
         <p:sp>
           <p:nvSpPr>
@@ -4015,7 +4128,7 @@
             </a:ln>
             <a:extLst>
               <a:ext uri="{91240B29-F687-4f45-9708-019B960494DF}">
-                <a14:hiddenLine xmlns="" xmlns:a14="http://schemas.microsoft.com/office/drawing/2010/main" w="9525">
+                <a14:hiddenLine xmlns:a14="http://schemas.microsoft.com/office/drawing/2010/main" xmlns="" w="9525">
                   <a:solidFill>
                     <a:srgbClr val="000000"/>
                   </a:solidFill>
@@ -4026,6 +4139,13 @@
               </a:ext>
             </a:extLst>
           </p:spPr>
+          <p:txBody>
+            <a:bodyPr/>
+            <a:lstStyle/>
+            <a:p>
+              <a:endParaRPr lang="en-IN"/>
+            </a:p>
+          </p:txBody>
         </p:sp>
         <p:sp>
           <p:nvSpPr>
@@ -4125,7 +4245,7 @@
             </a:ln>
             <a:extLst>
               <a:ext uri="{91240B29-F687-4f45-9708-019B960494DF}">
-                <a14:hiddenLine xmlns="" xmlns:a14="http://schemas.microsoft.com/office/drawing/2010/main" w="9525">
+                <a14:hiddenLine xmlns:a14="http://schemas.microsoft.com/office/drawing/2010/main" xmlns="" w="9525">
                   <a:solidFill>
                     <a:srgbClr val="000000"/>
                   </a:solidFill>
@@ -4136,6 +4256,13 @@
               </a:ext>
             </a:extLst>
           </p:spPr>
+          <p:txBody>
+            <a:bodyPr/>
+            <a:lstStyle/>
+            <a:p>
+              <a:endParaRPr lang="en-IN"/>
+            </a:p>
+          </p:txBody>
         </p:sp>
         <p:sp>
           <p:nvSpPr>
@@ -4187,7 +4314,7 @@
             </a:ln>
             <a:extLst>
               <a:ext uri="{91240B29-F687-4f45-9708-019B960494DF}">
-                <a14:hiddenLine xmlns="" xmlns:a14="http://schemas.microsoft.com/office/drawing/2010/main" w="9525">
+                <a14:hiddenLine xmlns:a14="http://schemas.microsoft.com/office/drawing/2010/main" xmlns="" w="9525">
                   <a:solidFill>
                     <a:srgbClr val="000000"/>
                   </a:solidFill>
@@ -4198,6 +4325,13 @@
               </a:ext>
             </a:extLst>
           </p:spPr>
+          <p:txBody>
+            <a:bodyPr/>
+            <a:lstStyle/>
+            <a:p>
+              <a:endParaRPr lang="en-IN"/>
+            </a:p>
+          </p:txBody>
         </p:sp>
         <p:sp>
           <p:nvSpPr>
@@ -4277,7 +4411,7 @@
             </a:ln>
             <a:extLst>
               <a:ext uri="{91240B29-F687-4f45-9708-019B960494DF}">
-                <a14:hiddenLine xmlns="" xmlns:a14="http://schemas.microsoft.com/office/drawing/2010/main" w="9525">
+                <a14:hiddenLine xmlns:a14="http://schemas.microsoft.com/office/drawing/2010/main" xmlns="" w="9525">
                   <a:solidFill>
                     <a:srgbClr val="000000"/>
                   </a:solidFill>
@@ -4288,6 +4422,13 @@
               </a:ext>
             </a:extLst>
           </p:spPr>
+          <p:txBody>
+            <a:bodyPr/>
+            <a:lstStyle/>
+            <a:p>
+              <a:endParaRPr lang="en-IN"/>
+            </a:p>
+          </p:txBody>
         </p:sp>
         <p:sp>
           <p:nvSpPr>
@@ -4367,7 +4508,7 @@
             </a:ln>
             <a:extLst>
               <a:ext uri="{91240B29-F687-4f45-9708-019B960494DF}">
-                <a14:hiddenLine xmlns="" xmlns:a14="http://schemas.microsoft.com/office/drawing/2010/main" w="9525">
+                <a14:hiddenLine xmlns:a14="http://schemas.microsoft.com/office/drawing/2010/main" xmlns="" w="9525">
                   <a:solidFill>
                     <a:srgbClr val="000000"/>
                   </a:solidFill>
@@ -4378,6 +4519,13 @@
               </a:ext>
             </a:extLst>
           </p:spPr>
+          <p:txBody>
+            <a:bodyPr/>
+            <a:lstStyle/>
+            <a:p>
+              <a:endParaRPr lang="en-IN"/>
+            </a:p>
+          </p:txBody>
         </p:sp>
         <p:sp>
           <p:nvSpPr>
@@ -4429,7 +4577,7 @@
             </a:ln>
             <a:extLst>
               <a:ext uri="{91240B29-F687-4f45-9708-019B960494DF}">
-                <a14:hiddenLine xmlns="" xmlns:a14="http://schemas.microsoft.com/office/drawing/2010/main" w="9525">
+                <a14:hiddenLine xmlns:a14="http://schemas.microsoft.com/office/drawing/2010/main" xmlns="" w="9525">
                   <a:solidFill>
                     <a:srgbClr val="000000"/>
                   </a:solidFill>
@@ -4440,6 +4588,13 @@
               </a:ext>
             </a:extLst>
           </p:spPr>
+          <p:txBody>
+            <a:bodyPr/>
+            <a:lstStyle/>
+            <a:p>
+              <a:endParaRPr lang="en-IN"/>
+            </a:p>
+          </p:txBody>
         </p:sp>
         <p:sp>
           <p:nvSpPr>
@@ -4519,7 +4674,7 @@
             </a:ln>
             <a:extLst>
               <a:ext uri="{91240B29-F687-4f45-9708-019B960494DF}">
-                <a14:hiddenLine xmlns="" xmlns:a14="http://schemas.microsoft.com/office/drawing/2010/main" w="9525">
+                <a14:hiddenLine xmlns:a14="http://schemas.microsoft.com/office/drawing/2010/main" xmlns="" w="9525">
                   <a:solidFill>
                     <a:srgbClr val="000000"/>
                   </a:solidFill>
@@ -4530,6 +4685,13 @@
               </a:ext>
             </a:extLst>
           </p:spPr>
+          <p:txBody>
+            <a:bodyPr/>
+            <a:lstStyle/>
+            <a:p>
+              <a:endParaRPr lang="en-IN"/>
+            </a:p>
+          </p:txBody>
         </p:sp>
         <p:sp>
           <p:nvSpPr>
@@ -4609,7 +4771,7 @@
             </a:ln>
             <a:extLst>
               <a:ext uri="{91240B29-F687-4f45-9708-019B960494DF}">
-                <a14:hiddenLine xmlns="" xmlns:a14="http://schemas.microsoft.com/office/drawing/2010/main" w="9525">
+                <a14:hiddenLine xmlns:a14="http://schemas.microsoft.com/office/drawing/2010/main" xmlns="" w="9525">
                   <a:solidFill>
                     <a:srgbClr val="000000"/>
                   </a:solidFill>
@@ -4620,6 +4782,13 @@
               </a:ext>
             </a:extLst>
           </p:spPr>
+          <p:txBody>
+            <a:bodyPr/>
+            <a:lstStyle/>
+            <a:p>
+              <a:endParaRPr lang="en-IN"/>
+            </a:p>
+          </p:txBody>
         </p:sp>
         <p:sp>
           <p:nvSpPr>
@@ -4665,7 +4834,7 @@
             </a:ln>
             <a:extLst>
               <a:ext uri="{91240B29-F687-4f45-9708-019B960494DF}">
-                <a14:hiddenLine xmlns="" xmlns:a14="http://schemas.microsoft.com/office/drawing/2010/main" w="9525">
+                <a14:hiddenLine xmlns:a14="http://schemas.microsoft.com/office/drawing/2010/main" xmlns="" w="9525">
                   <a:solidFill>
                     <a:srgbClr val="000000"/>
                   </a:solidFill>
@@ -4676,6 +4845,13 @@
               </a:ext>
             </a:extLst>
           </p:spPr>
+          <p:txBody>
+            <a:bodyPr/>
+            <a:lstStyle/>
+            <a:p>
+              <a:endParaRPr lang="en-IN"/>
+            </a:p>
+          </p:txBody>
         </p:sp>
         <p:sp>
           <p:nvSpPr>
@@ -4755,7 +4931,7 @@
             </a:ln>
             <a:extLst>
               <a:ext uri="{91240B29-F687-4f45-9708-019B960494DF}">
-                <a14:hiddenLine xmlns="" xmlns:a14="http://schemas.microsoft.com/office/drawing/2010/main" w="9525">
+                <a14:hiddenLine xmlns:a14="http://schemas.microsoft.com/office/drawing/2010/main" xmlns="" w="9525">
                   <a:solidFill>
                     <a:srgbClr val="000000"/>
                   </a:solidFill>
@@ -4766,6 +4942,13 @@
               </a:ext>
             </a:extLst>
           </p:spPr>
+          <p:txBody>
+            <a:bodyPr/>
+            <a:lstStyle/>
+            <a:p>
+              <a:endParaRPr lang="en-IN"/>
+            </a:p>
+          </p:txBody>
         </p:sp>
         <p:sp>
           <p:nvSpPr>
@@ -4811,7 +4994,7 @@
             </a:ln>
             <a:extLst>
               <a:ext uri="{91240B29-F687-4f45-9708-019B960494DF}">
-                <a14:hiddenLine xmlns="" xmlns:a14="http://schemas.microsoft.com/office/drawing/2010/main" w="9525">
+                <a14:hiddenLine xmlns:a14="http://schemas.microsoft.com/office/drawing/2010/main" xmlns="" w="9525">
                   <a:solidFill>
                     <a:srgbClr val="000000"/>
                   </a:solidFill>
@@ -4822,6 +5005,13 @@
               </a:ext>
             </a:extLst>
           </p:spPr>
+          <p:txBody>
+            <a:bodyPr/>
+            <a:lstStyle/>
+            <a:p>
+              <a:endParaRPr lang="en-IN"/>
+            </a:p>
+          </p:txBody>
         </p:sp>
         <p:sp>
           <p:nvSpPr>
@@ -4901,7 +5091,7 @@
             </a:ln>
             <a:extLst>
               <a:ext uri="{91240B29-F687-4f45-9708-019B960494DF}">
-                <a14:hiddenLine xmlns="" xmlns:a14="http://schemas.microsoft.com/office/drawing/2010/main" w="9525">
+                <a14:hiddenLine xmlns:a14="http://schemas.microsoft.com/office/drawing/2010/main" xmlns="" w="9525">
                   <a:solidFill>
                     <a:srgbClr val="000000"/>
                   </a:solidFill>
@@ -4912,6 +5102,13 @@
               </a:ext>
             </a:extLst>
           </p:spPr>
+          <p:txBody>
+            <a:bodyPr/>
+            <a:lstStyle/>
+            <a:p>
+              <a:endParaRPr lang="en-IN"/>
+            </a:p>
+          </p:txBody>
         </p:sp>
         <p:sp>
           <p:nvSpPr>
@@ -4969,7 +5166,7 @@
             </a:ln>
             <a:extLst>
               <a:ext uri="{91240B29-F687-4f45-9708-019B960494DF}">
-                <a14:hiddenLine xmlns="" xmlns:a14="http://schemas.microsoft.com/office/drawing/2010/main" w="9525">
+                <a14:hiddenLine xmlns:a14="http://schemas.microsoft.com/office/drawing/2010/main" xmlns="" w="9525">
                   <a:solidFill>
                     <a:srgbClr val="000000"/>
                   </a:solidFill>
@@ -4980,6 +5177,13 @@
               </a:ext>
             </a:extLst>
           </p:spPr>
+          <p:txBody>
+            <a:bodyPr/>
+            <a:lstStyle/>
+            <a:p>
+              <a:endParaRPr lang="en-IN"/>
+            </a:p>
+          </p:txBody>
         </p:sp>
         <p:sp>
           <p:nvSpPr>
@@ -5059,7 +5263,7 @@
             </a:ln>
             <a:extLst>
               <a:ext uri="{91240B29-F687-4f45-9708-019B960494DF}">
-                <a14:hiddenLine xmlns="" xmlns:a14="http://schemas.microsoft.com/office/drawing/2010/main" w="9525">
+                <a14:hiddenLine xmlns:a14="http://schemas.microsoft.com/office/drawing/2010/main" xmlns="" w="9525">
                   <a:solidFill>
                     <a:srgbClr val="000000"/>
                   </a:solidFill>
@@ -5070,6 +5274,13 @@
               </a:ext>
             </a:extLst>
           </p:spPr>
+          <p:txBody>
+            <a:bodyPr/>
+            <a:lstStyle/>
+            <a:p>
+              <a:endParaRPr lang="en-IN"/>
+            </a:p>
+          </p:txBody>
         </p:sp>
         <p:sp>
           <p:nvSpPr>
@@ -5127,7 +5338,7 @@
             </a:ln>
             <a:extLst>
               <a:ext uri="{91240B29-F687-4f45-9708-019B960494DF}">
-                <a14:hiddenLine xmlns="" xmlns:a14="http://schemas.microsoft.com/office/drawing/2010/main" w="9525">
+                <a14:hiddenLine xmlns:a14="http://schemas.microsoft.com/office/drawing/2010/main" xmlns="" w="9525">
                   <a:solidFill>
                     <a:srgbClr val="000000"/>
                   </a:solidFill>
@@ -5138,6 +5349,13 @@
               </a:ext>
             </a:extLst>
           </p:spPr>
+          <p:txBody>
+            <a:bodyPr/>
+            <a:lstStyle/>
+            <a:p>
+              <a:endParaRPr lang="en-IN"/>
+            </a:p>
+          </p:txBody>
         </p:sp>
         <p:sp>
           <p:nvSpPr>
@@ -5217,7 +5435,7 @@
             </a:ln>
             <a:extLst>
               <a:ext uri="{91240B29-F687-4f45-9708-019B960494DF}">
-                <a14:hiddenLine xmlns="" xmlns:a14="http://schemas.microsoft.com/office/drawing/2010/main" w="9525">
+                <a14:hiddenLine xmlns:a14="http://schemas.microsoft.com/office/drawing/2010/main" xmlns="" w="9525">
                   <a:solidFill>
                     <a:srgbClr val="000000"/>
                   </a:solidFill>
@@ -5228,6 +5446,13 @@
               </a:ext>
             </a:extLst>
           </p:spPr>
+          <p:txBody>
+            <a:bodyPr/>
+            <a:lstStyle/>
+            <a:p>
+              <a:endParaRPr lang="en-IN"/>
+            </a:p>
+          </p:txBody>
         </p:sp>
         <p:sp>
           <p:nvSpPr>
@@ -5251,7 +5476,7 @@
             </a:ln>
             <a:extLst>
               <a:ext uri="{91240B29-F687-4f45-9708-019B960494DF}">
-                <a14:hiddenLine xmlns="" xmlns:a14="http://schemas.microsoft.com/office/drawing/2010/main" w="9525">
+                <a14:hiddenLine xmlns:a14="http://schemas.microsoft.com/office/drawing/2010/main" xmlns="" w="9525">
                   <a:solidFill>
                     <a:srgbClr val="000000"/>
                   </a:solidFill>
@@ -5262,6 +5487,13 @@
               </a:ext>
             </a:extLst>
           </p:spPr>
+          <p:txBody>
+            <a:bodyPr/>
+            <a:lstStyle/>
+            <a:p>
+              <a:endParaRPr lang="en-IN"/>
+            </a:p>
+          </p:txBody>
         </p:sp>
         <p:sp>
           <p:nvSpPr>
@@ -5341,7 +5573,7 @@
             </a:ln>
             <a:extLst>
               <a:ext uri="{91240B29-F687-4f45-9708-019B960494DF}">
-                <a14:hiddenLine xmlns="" xmlns:a14="http://schemas.microsoft.com/office/drawing/2010/main" w="9525">
+                <a14:hiddenLine xmlns:a14="http://schemas.microsoft.com/office/drawing/2010/main" xmlns="" w="9525">
                   <a:solidFill>
                     <a:srgbClr val="000000"/>
                   </a:solidFill>
@@ -5352,6 +5584,13 @@
               </a:ext>
             </a:extLst>
           </p:spPr>
+          <p:txBody>
+            <a:bodyPr/>
+            <a:lstStyle/>
+            <a:p>
+              <a:endParaRPr lang="en-IN"/>
+            </a:p>
+          </p:txBody>
         </p:sp>
         <p:sp>
           <p:nvSpPr>
@@ -5403,7 +5642,7 @@
             </a:ln>
             <a:extLst>
               <a:ext uri="{91240B29-F687-4f45-9708-019B960494DF}">
-                <a14:hiddenLine xmlns="" xmlns:a14="http://schemas.microsoft.com/office/drawing/2010/main" w="9525">
+                <a14:hiddenLine xmlns:a14="http://schemas.microsoft.com/office/drawing/2010/main" xmlns="" w="9525">
                   <a:solidFill>
                     <a:srgbClr val="000000"/>
                   </a:solidFill>
@@ -5414,6 +5653,13 @@
               </a:ext>
             </a:extLst>
           </p:spPr>
+          <p:txBody>
+            <a:bodyPr/>
+            <a:lstStyle/>
+            <a:p>
+              <a:endParaRPr lang="en-IN"/>
+            </a:p>
+          </p:txBody>
         </p:sp>
         <p:sp>
           <p:nvSpPr>
@@ -5465,7 +5711,7 @@
             </a:ln>
             <a:extLst>
               <a:ext uri="{91240B29-F687-4f45-9708-019B960494DF}">
-                <a14:hiddenLine xmlns="" xmlns:a14="http://schemas.microsoft.com/office/drawing/2010/main" w="9525">
+                <a14:hiddenLine xmlns:a14="http://schemas.microsoft.com/office/drawing/2010/main" xmlns="" w="9525">
                   <a:solidFill>
                     <a:srgbClr val="000000"/>
                   </a:solidFill>
@@ -5476,6 +5722,13 @@
               </a:ext>
             </a:extLst>
           </p:spPr>
+          <p:txBody>
+            <a:bodyPr/>
+            <a:lstStyle/>
+            <a:p>
+              <a:endParaRPr lang="en-IN"/>
+            </a:p>
+          </p:txBody>
         </p:sp>
         <p:sp>
           <p:nvSpPr>
@@ -5555,7 +5808,7 @@
             </a:ln>
             <a:extLst>
               <a:ext uri="{91240B29-F687-4f45-9708-019B960494DF}">
-                <a14:hiddenLine xmlns="" xmlns:a14="http://schemas.microsoft.com/office/drawing/2010/main" w="9525">
+                <a14:hiddenLine xmlns:a14="http://schemas.microsoft.com/office/drawing/2010/main" xmlns="" w="9525">
                   <a:solidFill>
                     <a:srgbClr val="000000"/>
                   </a:solidFill>
@@ -5566,6 +5819,13 @@
               </a:ext>
             </a:extLst>
           </p:spPr>
+          <p:txBody>
+            <a:bodyPr/>
+            <a:lstStyle/>
+            <a:p>
+              <a:endParaRPr lang="en-IN"/>
+            </a:p>
+          </p:txBody>
         </p:sp>
         <p:sp>
           <p:nvSpPr>
@@ -5623,7 +5883,7 @@
             </a:ln>
             <a:extLst>
               <a:ext uri="{91240B29-F687-4f45-9708-019B960494DF}">
-                <a14:hiddenLine xmlns="" xmlns:a14="http://schemas.microsoft.com/office/drawing/2010/main" w="9525">
+                <a14:hiddenLine xmlns:a14="http://schemas.microsoft.com/office/drawing/2010/main" xmlns="" w="9525">
                   <a:solidFill>
                     <a:srgbClr val="000000"/>
                   </a:solidFill>
@@ -5634,6 +5894,13 @@
               </a:ext>
             </a:extLst>
           </p:spPr>
+          <p:txBody>
+            <a:bodyPr/>
+            <a:lstStyle/>
+            <a:p>
+              <a:endParaRPr lang="en-IN"/>
+            </a:p>
+          </p:txBody>
         </p:sp>
         <p:sp>
           <p:nvSpPr>
@@ -5685,7 +5952,7 @@
             </a:ln>
             <a:extLst>
               <a:ext uri="{91240B29-F687-4f45-9708-019B960494DF}">
-                <a14:hiddenLine xmlns="" xmlns:a14="http://schemas.microsoft.com/office/drawing/2010/main" w="9525">
+                <a14:hiddenLine xmlns:a14="http://schemas.microsoft.com/office/drawing/2010/main" xmlns="" w="9525">
                   <a:solidFill>
                     <a:srgbClr val="000000"/>
                   </a:solidFill>
@@ -5696,6 +5963,13 @@
               </a:ext>
             </a:extLst>
           </p:spPr>
+          <p:txBody>
+            <a:bodyPr/>
+            <a:lstStyle/>
+            <a:p>
+              <a:endParaRPr lang="en-IN"/>
+            </a:p>
+          </p:txBody>
         </p:sp>
         <p:sp>
           <p:nvSpPr>
@@ -5775,7 +6049,7 @@
             </a:ln>
             <a:extLst>
               <a:ext uri="{91240B29-F687-4f45-9708-019B960494DF}">
-                <a14:hiddenLine xmlns="" xmlns:a14="http://schemas.microsoft.com/office/drawing/2010/main" w="9525">
+                <a14:hiddenLine xmlns:a14="http://schemas.microsoft.com/office/drawing/2010/main" xmlns="" w="9525">
                   <a:solidFill>
                     <a:srgbClr val="000000"/>
                   </a:solidFill>
@@ -5786,6 +6060,13 @@
               </a:ext>
             </a:extLst>
           </p:spPr>
+          <p:txBody>
+            <a:bodyPr/>
+            <a:lstStyle/>
+            <a:p>
+              <a:endParaRPr lang="en-IN"/>
+            </a:p>
+          </p:txBody>
         </p:sp>
         <p:sp>
           <p:nvSpPr>
@@ -5837,7 +6118,7 @@
             </a:ln>
             <a:extLst>
               <a:ext uri="{91240B29-F687-4f45-9708-019B960494DF}">
-                <a14:hiddenLine xmlns="" xmlns:a14="http://schemas.microsoft.com/office/drawing/2010/main" w="9525">
+                <a14:hiddenLine xmlns:a14="http://schemas.microsoft.com/office/drawing/2010/main" xmlns="" w="9525">
                   <a:solidFill>
                     <a:srgbClr val="000000"/>
                   </a:solidFill>
@@ -5848,6 +6129,13 @@
               </a:ext>
             </a:extLst>
           </p:spPr>
+          <p:txBody>
+            <a:bodyPr/>
+            <a:lstStyle/>
+            <a:p>
+              <a:endParaRPr lang="en-IN"/>
+            </a:p>
+          </p:txBody>
         </p:sp>
         <p:sp>
           <p:nvSpPr>
@@ -5927,7 +6215,7 @@
             </a:ln>
             <a:extLst>
               <a:ext uri="{91240B29-F687-4f45-9708-019B960494DF}">
-                <a14:hiddenLine xmlns="" xmlns:a14="http://schemas.microsoft.com/office/drawing/2010/main" w="9525">
+                <a14:hiddenLine xmlns:a14="http://schemas.microsoft.com/office/drawing/2010/main" xmlns="" w="9525">
                   <a:solidFill>
                     <a:srgbClr val="000000"/>
                   </a:solidFill>
@@ -5938,6 +6226,13 @@
               </a:ext>
             </a:extLst>
           </p:spPr>
+          <p:txBody>
+            <a:bodyPr/>
+            <a:lstStyle/>
+            <a:p>
+              <a:endParaRPr lang="en-IN"/>
+            </a:p>
+          </p:txBody>
         </p:sp>
         <p:sp>
           <p:nvSpPr>
@@ -5989,7 +6284,7 @@
             </a:ln>
             <a:extLst>
               <a:ext uri="{91240B29-F687-4f45-9708-019B960494DF}">
-                <a14:hiddenLine xmlns="" xmlns:a14="http://schemas.microsoft.com/office/drawing/2010/main" w="9525">
+                <a14:hiddenLine xmlns:a14="http://schemas.microsoft.com/office/drawing/2010/main" xmlns="" w="9525">
                   <a:solidFill>
                     <a:srgbClr val="000000"/>
                   </a:solidFill>
@@ -6000,6 +6295,13 @@
               </a:ext>
             </a:extLst>
           </p:spPr>
+          <p:txBody>
+            <a:bodyPr/>
+            <a:lstStyle/>
+            <a:p>
+              <a:endParaRPr lang="en-IN"/>
+            </a:p>
+          </p:txBody>
         </p:sp>
         <p:sp>
           <p:nvSpPr>
@@ -6079,7 +6381,7 @@
             </a:ln>
             <a:extLst>
               <a:ext uri="{91240B29-F687-4f45-9708-019B960494DF}">
-                <a14:hiddenLine xmlns="" xmlns:a14="http://schemas.microsoft.com/office/drawing/2010/main" w="9525">
+                <a14:hiddenLine xmlns:a14="http://schemas.microsoft.com/office/drawing/2010/main" xmlns="" w="9525">
                   <a:solidFill>
                     <a:srgbClr val="000000"/>
                   </a:solidFill>
@@ -6090,6 +6392,13 @@
               </a:ext>
             </a:extLst>
           </p:spPr>
+          <p:txBody>
+            <a:bodyPr/>
+            <a:lstStyle/>
+            <a:p>
+              <a:endParaRPr lang="en-IN"/>
+            </a:p>
+          </p:txBody>
         </p:sp>
         <p:sp>
           <p:nvSpPr>
@@ -6113,7 +6422,7 @@
             </a:ln>
             <a:extLst>
               <a:ext uri="{91240B29-F687-4f45-9708-019B960494DF}">
-                <a14:hiddenLine xmlns="" xmlns:a14="http://schemas.microsoft.com/office/drawing/2010/main" w="9525">
+                <a14:hiddenLine xmlns:a14="http://schemas.microsoft.com/office/drawing/2010/main" xmlns="" w="9525">
                   <a:solidFill>
                     <a:srgbClr val="000000"/>
                   </a:solidFill>
@@ -6124,6 +6433,13 @@
               </a:ext>
             </a:extLst>
           </p:spPr>
+          <p:txBody>
+            <a:bodyPr/>
+            <a:lstStyle/>
+            <a:p>
+              <a:endParaRPr lang="en-IN"/>
+            </a:p>
+          </p:txBody>
         </p:sp>
         <p:sp>
           <p:nvSpPr>
@@ -6178,7 +6494,7 @@
             </a:ln>
             <a:extLst>
               <a:ext uri="{91240B29-F687-4f45-9708-019B960494DF}">
-                <a14:hiddenLine xmlns="" xmlns:a14="http://schemas.microsoft.com/office/drawing/2010/main" w="9525">
+                <a14:hiddenLine xmlns:a14="http://schemas.microsoft.com/office/drawing/2010/main" xmlns="" w="9525">
                   <a:solidFill>
                     <a:srgbClr val="000000"/>
                   </a:solidFill>
@@ -6189,6 +6505,13 @@
               </a:ext>
             </a:extLst>
           </p:spPr>
+          <p:txBody>
+            <a:bodyPr/>
+            <a:lstStyle/>
+            <a:p>
+              <a:endParaRPr lang="en-IN"/>
+            </a:p>
+          </p:txBody>
         </p:sp>
         <p:sp>
           <p:nvSpPr>
@@ -6268,7 +6591,7 @@
             </a:ln>
             <a:extLst>
               <a:ext uri="{91240B29-F687-4f45-9708-019B960494DF}">
-                <a14:hiddenLine xmlns="" xmlns:a14="http://schemas.microsoft.com/office/drawing/2010/main" w="9525">
+                <a14:hiddenLine xmlns:a14="http://schemas.microsoft.com/office/drawing/2010/main" xmlns="" w="9525">
                   <a:solidFill>
                     <a:srgbClr val="000000"/>
                   </a:solidFill>
@@ -6279,6 +6602,13 @@
               </a:ext>
             </a:extLst>
           </p:spPr>
+          <p:txBody>
+            <a:bodyPr/>
+            <a:lstStyle/>
+            <a:p>
+              <a:endParaRPr lang="en-IN"/>
+            </a:p>
+          </p:txBody>
         </p:sp>
         <p:sp>
           <p:nvSpPr>
@@ -6330,7 +6660,7 @@
             </a:ln>
             <a:extLst>
               <a:ext uri="{91240B29-F687-4f45-9708-019B960494DF}">
-                <a14:hiddenLine xmlns="" xmlns:a14="http://schemas.microsoft.com/office/drawing/2010/main" w="9525">
+                <a14:hiddenLine xmlns:a14="http://schemas.microsoft.com/office/drawing/2010/main" xmlns="" w="9525">
                   <a:solidFill>
                     <a:srgbClr val="000000"/>
                   </a:solidFill>
@@ -6341,6 +6671,13 @@
               </a:ext>
             </a:extLst>
           </p:spPr>
+          <p:txBody>
+            <a:bodyPr/>
+            <a:lstStyle/>
+            <a:p>
+              <a:endParaRPr lang="en-IN"/>
+            </a:p>
+          </p:txBody>
         </p:sp>
         <p:sp>
           <p:nvSpPr>
@@ -6420,7 +6757,7 @@
             </a:ln>
             <a:extLst>
               <a:ext uri="{91240B29-F687-4f45-9708-019B960494DF}">
-                <a14:hiddenLine xmlns="" xmlns:a14="http://schemas.microsoft.com/office/drawing/2010/main" w="9525">
+                <a14:hiddenLine xmlns:a14="http://schemas.microsoft.com/office/drawing/2010/main" xmlns="" w="9525">
                   <a:solidFill>
                     <a:srgbClr val="000000"/>
                   </a:solidFill>
@@ -6431,6 +6768,13 @@
               </a:ext>
             </a:extLst>
           </p:spPr>
+          <p:txBody>
+            <a:bodyPr/>
+            <a:lstStyle/>
+            <a:p>
+              <a:endParaRPr lang="en-IN"/>
+            </a:p>
+          </p:txBody>
         </p:sp>
         <p:sp>
           <p:nvSpPr>
@@ -6510,7 +6854,7 @@
             </a:ln>
             <a:extLst>
               <a:ext uri="{91240B29-F687-4f45-9708-019B960494DF}">
-                <a14:hiddenLine xmlns="" xmlns:a14="http://schemas.microsoft.com/office/drawing/2010/main" w="9525">
+                <a14:hiddenLine xmlns:a14="http://schemas.microsoft.com/office/drawing/2010/main" xmlns="" w="9525">
                   <a:solidFill>
                     <a:srgbClr val="000000"/>
                   </a:solidFill>
@@ -6521,6 +6865,13 @@
               </a:ext>
             </a:extLst>
           </p:spPr>
+          <p:txBody>
+            <a:bodyPr/>
+            <a:lstStyle/>
+            <a:p>
+              <a:endParaRPr lang="en-IN"/>
+            </a:p>
+          </p:txBody>
         </p:sp>
         <p:sp>
           <p:nvSpPr>
@@ -6575,7 +6926,7 @@
             </a:ln>
             <a:extLst>
               <a:ext uri="{91240B29-F687-4f45-9708-019B960494DF}">
-                <a14:hiddenLine xmlns="" xmlns:a14="http://schemas.microsoft.com/office/drawing/2010/main" w="9525">
+                <a14:hiddenLine xmlns:a14="http://schemas.microsoft.com/office/drawing/2010/main" xmlns="" w="9525">
                   <a:solidFill>
                     <a:srgbClr val="000000"/>
                   </a:solidFill>
@@ -6586,6 +6937,13 @@
               </a:ext>
             </a:extLst>
           </p:spPr>
+          <p:txBody>
+            <a:bodyPr/>
+            <a:lstStyle/>
+            <a:p>
+              <a:endParaRPr lang="en-IN"/>
+            </a:p>
+          </p:txBody>
         </p:sp>
         <p:sp>
           <p:nvSpPr>
@@ -6637,7 +6995,7 @@
             </a:ln>
             <a:extLst>
               <a:ext uri="{91240B29-F687-4f45-9708-019B960494DF}">
-                <a14:hiddenLine xmlns="" xmlns:a14="http://schemas.microsoft.com/office/drawing/2010/main" w="9525">
+                <a14:hiddenLine xmlns:a14="http://schemas.microsoft.com/office/drawing/2010/main" xmlns="" w="9525">
                   <a:solidFill>
                     <a:srgbClr val="000000"/>
                   </a:solidFill>
@@ -6648,6 +7006,13 @@
               </a:ext>
             </a:extLst>
           </p:spPr>
+          <p:txBody>
+            <a:bodyPr/>
+            <a:lstStyle/>
+            <a:p>
+              <a:endParaRPr lang="en-IN"/>
+            </a:p>
+          </p:txBody>
         </p:sp>
         <p:sp>
           <p:nvSpPr>
@@ -6727,7 +7092,7 @@
             </a:ln>
             <a:extLst>
               <a:ext uri="{91240B29-F687-4f45-9708-019B960494DF}">
-                <a14:hiddenLine xmlns="" xmlns:a14="http://schemas.microsoft.com/office/drawing/2010/main" w="9525">
+                <a14:hiddenLine xmlns:a14="http://schemas.microsoft.com/office/drawing/2010/main" xmlns="" w="9525">
                   <a:solidFill>
                     <a:srgbClr val="000000"/>
                   </a:solidFill>
@@ -6738,6 +7103,13 @@
               </a:ext>
             </a:extLst>
           </p:spPr>
+          <p:txBody>
+            <a:bodyPr/>
+            <a:lstStyle/>
+            <a:p>
+              <a:endParaRPr lang="en-IN"/>
+            </a:p>
+          </p:txBody>
         </p:sp>
         <p:sp>
           <p:nvSpPr>
@@ -6817,7 +7189,7 @@
             </a:ln>
             <a:extLst>
               <a:ext uri="{91240B29-F687-4f45-9708-019B960494DF}">
-                <a14:hiddenLine xmlns="" xmlns:a14="http://schemas.microsoft.com/office/drawing/2010/main" w="9525">
+                <a14:hiddenLine xmlns:a14="http://schemas.microsoft.com/office/drawing/2010/main" xmlns="" w="9525">
                   <a:solidFill>
                     <a:srgbClr val="000000"/>
                   </a:solidFill>
@@ -6828,6 +7200,13 @@
               </a:ext>
             </a:extLst>
           </p:spPr>
+          <p:txBody>
+            <a:bodyPr/>
+            <a:lstStyle/>
+            <a:p>
+              <a:endParaRPr lang="en-IN"/>
+            </a:p>
+          </p:txBody>
         </p:sp>
         <p:sp>
           <p:nvSpPr>
@@ -6879,7 +7258,7 @@
             </a:ln>
             <a:extLst>
               <a:ext uri="{91240B29-F687-4f45-9708-019B960494DF}">
-                <a14:hiddenLine xmlns="" xmlns:a14="http://schemas.microsoft.com/office/drawing/2010/main" w="9525">
+                <a14:hiddenLine xmlns:a14="http://schemas.microsoft.com/office/drawing/2010/main" xmlns="" w="9525">
                   <a:solidFill>
                     <a:srgbClr val="000000"/>
                   </a:solidFill>
@@ -6890,6 +7269,13 @@
               </a:ext>
             </a:extLst>
           </p:spPr>
+          <p:txBody>
+            <a:bodyPr/>
+            <a:lstStyle/>
+            <a:p>
+              <a:endParaRPr lang="en-IN"/>
+            </a:p>
+          </p:txBody>
         </p:sp>
         <p:sp>
           <p:nvSpPr>
@@ -6999,7 +7385,7 @@
             </a:ln>
             <a:extLst>
               <a:ext uri="{91240B29-F687-4f45-9708-019B960494DF}">
-                <a14:hiddenLine xmlns="" xmlns:a14="http://schemas.microsoft.com/office/drawing/2010/main" w="9525">
+                <a14:hiddenLine xmlns:a14="http://schemas.microsoft.com/office/drawing/2010/main" xmlns="" w="9525">
                   <a:solidFill>
                     <a:srgbClr val="000000"/>
                   </a:solidFill>
@@ -7010,6 +7396,13 @@
               </a:ext>
             </a:extLst>
           </p:spPr>
+          <p:txBody>
+            <a:bodyPr/>
+            <a:lstStyle/>
+            <a:p>
+              <a:endParaRPr lang="en-IN"/>
+            </a:p>
+          </p:txBody>
         </p:sp>
         <p:sp>
           <p:nvSpPr>
@@ -7067,7 +7460,7 @@
             </a:ln>
             <a:extLst>
               <a:ext uri="{91240B29-F687-4f45-9708-019B960494DF}">
-                <a14:hiddenLine xmlns="" xmlns:a14="http://schemas.microsoft.com/office/drawing/2010/main" w="9525">
+                <a14:hiddenLine xmlns:a14="http://schemas.microsoft.com/office/drawing/2010/main" xmlns="" w="9525">
                   <a:solidFill>
                     <a:srgbClr val="000000"/>
                   </a:solidFill>
@@ -7078,6 +7471,13 @@
               </a:ext>
             </a:extLst>
           </p:spPr>
+          <p:txBody>
+            <a:bodyPr/>
+            <a:lstStyle/>
+            <a:p>
+              <a:endParaRPr lang="en-IN"/>
+            </a:p>
+          </p:txBody>
         </p:sp>
         <p:sp>
           <p:nvSpPr>
@@ -7157,7 +7557,7 @@
             </a:ln>
             <a:extLst>
               <a:ext uri="{91240B29-F687-4f45-9708-019B960494DF}">
-                <a14:hiddenLine xmlns="" xmlns:a14="http://schemas.microsoft.com/office/drawing/2010/main" w="9525">
+                <a14:hiddenLine xmlns:a14="http://schemas.microsoft.com/office/drawing/2010/main" xmlns="" w="9525">
                   <a:solidFill>
                     <a:srgbClr val="000000"/>
                   </a:solidFill>
@@ -7168,6 +7568,13 @@
               </a:ext>
             </a:extLst>
           </p:spPr>
+          <p:txBody>
+            <a:bodyPr/>
+            <a:lstStyle/>
+            <a:p>
+              <a:endParaRPr lang="en-IN"/>
+            </a:p>
+          </p:txBody>
         </p:sp>
       </p:grpSp>
       <p:sp>
@@ -7297,7 +7704,7 @@
           <a:p>
             <a:fld id="{5BCAD085-E8A6-8845-BD4E-CB4CCA059FC4}" type="datetimeFigureOut">
               <a:rPr lang="en-US" smtClean="0"/>
-              <a:t>7/21/2025</a:t>
+              <a:t>4/22/2026</a:t>
             </a:fld>
             <a:endParaRPr lang="en-US"/>
           </a:p>
@@ -7564,7 +7971,7 @@
           <a:p>
             <a:fld id="{5BCAD085-E8A6-8845-BD4E-CB4CCA059FC4}" type="datetimeFigureOut">
               <a:rPr lang="en-US" smtClean="0"/>
-              <a:t>7/21/2025</a:t>
+              <a:t>4/22/2026</a:t>
             </a:fld>
             <a:endParaRPr lang="en-US"/>
           </a:p>
@@ -7760,7 +8167,7 @@
           <a:p>
             <a:fld id="{5BCAD085-E8A6-8845-BD4E-CB4CCA059FC4}" type="datetimeFigureOut">
               <a:rPr lang="en-US" smtClean="0"/>
-              <a:t>7/21/2025</a:t>
+              <a:t>4/22/2026</a:t>
             </a:fld>
             <a:endParaRPr lang="en-US"/>
           </a:p>
@@ -8023,7 +8430,7 @@
           <a:p>
             <a:fld id="{5BCAD085-E8A6-8845-BD4E-CB4CCA059FC4}" type="datetimeFigureOut">
               <a:rPr lang="en-US" smtClean="0"/>
-              <a:t>7/21/2025</a:t>
+              <a:t>4/22/2026</a:t>
             </a:fld>
             <a:endParaRPr lang="en-US"/>
           </a:p>
@@ -8457,7 +8864,7 @@
           <a:p>
             <a:fld id="{5BCAD085-E8A6-8845-BD4E-CB4CCA059FC4}" type="datetimeFigureOut">
               <a:rPr lang="en-US" smtClean="0"/>
-              <a:t>7/21/2025</a:t>
+              <a:t>4/22/2026</a:t>
             </a:fld>
             <a:endParaRPr lang="en-US"/>
           </a:p>
@@ -9003,7 +9410,7 @@
           <a:p>
             <a:fld id="{5BCAD085-E8A6-8845-BD4E-CB4CCA059FC4}" type="datetimeFigureOut">
               <a:rPr lang="en-US" smtClean="0"/>
-              <a:t>7/21/2025</a:t>
+              <a:t>4/22/2026</a:t>
             </a:fld>
             <a:endParaRPr lang="en-US"/>
           </a:p>
@@ -9723,7 +10130,7 @@
           <a:p>
             <a:fld id="{5BCAD085-E8A6-8845-BD4E-CB4CCA059FC4}" type="datetimeFigureOut">
               <a:rPr lang="en-US" smtClean="0"/>
-              <a:t>7/21/2025</a:t>
+              <a:t>4/22/2026</a:t>
             </a:fld>
             <a:endParaRPr lang="en-US"/>
           </a:p>
@@ -9897,7 +10304,7 @@
           <a:p>
             <a:fld id="{5BCAD085-E8A6-8845-BD4E-CB4CCA059FC4}" type="datetimeFigureOut">
               <a:rPr lang="en-US" smtClean="0"/>
-              <a:t>7/21/2025</a:t>
+              <a:t>4/22/2026</a:t>
             </a:fld>
             <a:endParaRPr lang="en-US"/>
           </a:p>
@@ -10077,7 +10484,7 @@
           <a:p>
             <a:fld id="{5BCAD085-E8A6-8845-BD4E-CB4CCA059FC4}" type="datetimeFigureOut">
               <a:rPr lang="en-US" smtClean="0"/>
-              <a:t>7/21/2025</a:t>
+              <a:t>4/22/2026</a:t>
             </a:fld>
             <a:endParaRPr lang="en-US"/>
           </a:p>
@@ -10262,7 +10669,7 @@
           <a:p>
             <a:fld id="{5BCAD085-E8A6-8845-BD4E-CB4CCA059FC4}" type="datetimeFigureOut">
               <a:rPr lang="en-US" smtClean="0"/>
-              <a:t>7/21/2025</a:t>
+              <a:t>4/22/2026</a:t>
             </a:fld>
             <a:endParaRPr lang="en-US"/>
           </a:p>
@@ -10522,7 +10929,7 @@
           <a:p>
             <a:fld id="{5BCAD085-E8A6-8845-BD4E-CB4CCA059FC4}" type="datetimeFigureOut">
               <a:rPr lang="en-US" smtClean="0"/>
-              <a:t>7/21/2025</a:t>
+              <a:t>4/22/2026</a:t>
             </a:fld>
             <a:endParaRPr lang="en-US"/>
           </a:p>
@@ -10754,7 +11161,7 @@
           <a:p>
             <a:fld id="{5BCAD085-E8A6-8845-BD4E-CB4CCA059FC4}" type="datetimeFigureOut">
               <a:rPr lang="en-US" smtClean="0"/>
-              <a:t>7/21/2025</a:t>
+              <a:t>4/22/2026</a:t>
             </a:fld>
             <a:endParaRPr lang="en-US"/>
           </a:p>
@@ -11135,7 +11542,7 @@
           <a:p>
             <a:fld id="{5BCAD085-E8A6-8845-BD4E-CB4CCA059FC4}" type="datetimeFigureOut">
               <a:rPr lang="en-US" smtClean="0"/>
-              <a:t>7/21/2025</a:t>
+              <a:t>4/22/2026</a:t>
             </a:fld>
             <a:endParaRPr lang="en-US"/>
           </a:p>
@@ -11253,7 +11660,7 @@
           <a:p>
             <a:fld id="{5BCAD085-E8A6-8845-BD4E-CB4CCA059FC4}" type="datetimeFigureOut">
               <a:rPr lang="en-US" smtClean="0"/>
-              <a:t>7/21/2025</a:t>
+              <a:t>4/22/2026</a:t>
             </a:fld>
             <a:endParaRPr lang="en-US"/>
           </a:p>
@@ -11348,7 +11755,7 @@
           <a:p>
             <a:fld id="{5BCAD085-E8A6-8845-BD4E-CB4CCA059FC4}" type="datetimeFigureOut">
               <a:rPr lang="en-US" smtClean="0"/>
-              <a:t>7/21/2025</a:t>
+              <a:t>4/22/2026</a:t>
             </a:fld>
             <a:endParaRPr lang="en-US"/>
           </a:p>
@@ -11597,7 +12004,7 @@
           <a:p>
             <a:fld id="{5BCAD085-E8A6-8845-BD4E-CB4CCA059FC4}" type="datetimeFigureOut">
               <a:rPr lang="en-US" smtClean="0"/>
-              <a:t>7/21/2025</a:t>
+              <a:t>4/22/2026</a:t>
             </a:fld>
             <a:endParaRPr lang="en-US"/>
           </a:p>
@@ -11849,7 +12256,7 @@
           <a:p>
             <a:fld id="{5BCAD085-E8A6-8845-BD4E-CB4CCA059FC4}" type="datetimeFigureOut">
               <a:rPr lang="en-US" smtClean="0"/>
-              <a:t>7/21/2025</a:t>
+              <a:t>4/22/2026</a:t>
             </a:fld>
             <a:endParaRPr lang="en-US"/>
           </a:p>
@@ -11972,7 +12379,7 @@
           <a:noFill/>
           <a:extLst>
             <a:ext uri="{909E8E84-426E-40dd-AFC4-6F175D3DCCD1}">
-              <a14:hiddenFill xmlns="" xmlns:a14="http://schemas.microsoft.com/office/drawing/2010/main">
+              <a14:hiddenFill xmlns:a14="http://schemas.microsoft.com/office/drawing/2010/main" xmlns="">
                 <a:solidFill>
                   <a:srgbClr val="FFFFFF"/>
                 </a:solidFill>
@@ -12046,7 +12453,7 @@
               </a:ln>
               <a:extLst>
                 <a:ext uri="{91240B29-F687-4f45-9708-019B960494DF}">
-                  <a14:hiddenLine xmlns="" xmlns:a14="http://schemas.microsoft.com/office/drawing/2010/main" w="9525">
+                  <a14:hiddenLine xmlns:a14="http://schemas.microsoft.com/office/drawing/2010/main" xmlns="" w="9525">
                     <a:solidFill>
                       <a:srgbClr val="000000"/>
                     </a:solidFill>
@@ -12057,6 +12464,13 @@
                 </a:ext>
               </a:extLst>
             </p:spPr>
+            <p:txBody>
+              <a:bodyPr/>
+              <a:lstStyle/>
+              <a:p>
+                <a:endParaRPr lang="en-IN"/>
+              </a:p>
+            </p:txBody>
           </p:sp>
           <p:sp>
             <p:nvSpPr>
@@ -12136,7 +12550,7 @@
               </a:ln>
               <a:extLst>
                 <a:ext uri="{91240B29-F687-4f45-9708-019B960494DF}">
-                  <a14:hiddenLine xmlns="" xmlns:a14="http://schemas.microsoft.com/office/drawing/2010/main" w="9525">
+                  <a14:hiddenLine xmlns:a14="http://schemas.microsoft.com/office/drawing/2010/main" xmlns="" w="9525">
                     <a:solidFill>
                       <a:srgbClr val="000000"/>
                     </a:solidFill>
@@ -12147,6 +12561,13 @@
                 </a:ext>
               </a:extLst>
             </p:spPr>
+            <p:txBody>
+              <a:bodyPr/>
+              <a:lstStyle/>
+              <a:p>
+                <a:endParaRPr lang="en-IN"/>
+              </a:p>
+            </p:txBody>
           </p:sp>
           <p:sp>
             <p:nvSpPr>
@@ -12226,7 +12647,7 @@
               </a:ln>
               <a:extLst>
                 <a:ext uri="{91240B29-F687-4f45-9708-019B960494DF}">
-                  <a14:hiddenLine xmlns="" xmlns:a14="http://schemas.microsoft.com/office/drawing/2010/main" w="9525">
+                  <a14:hiddenLine xmlns:a14="http://schemas.microsoft.com/office/drawing/2010/main" xmlns="" w="9525">
                     <a:solidFill>
                       <a:srgbClr val="000000"/>
                     </a:solidFill>
@@ -12237,6 +12658,13 @@
                 </a:ext>
               </a:extLst>
             </p:spPr>
+            <p:txBody>
+              <a:bodyPr/>
+              <a:lstStyle/>
+              <a:p>
+                <a:endParaRPr lang="en-IN"/>
+              </a:p>
+            </p:txBody>
           </p:sp>
           <p:sp>
             <p:nvSpPr>
@@ -12288,7 +12716,7 @@
               </a:ln>
               <a:extLst>
                 <a:ext uri="{91240B29-F687-4f45-9708-019B960494DF}">
-                  <a14:hiddenLine xmlns="" xmlns:a14="http://schemas.microsoft.com/office/drawing/2010/main" w="9525">
+                  <a14:hiddenLine xmlns:a14="http://schemas.microsoft.com/office/drawing/2010/main" xmlns="" w="9525">
                     <a:solidFill>
                       <a:srgbClr val="000000"/>
                     </a:solidFill>
@@ -12299,6 +12727,13 @@
                 </a:ext>
               </a:extLst>
             </p:spPr>
+            <p:txBody>
+              <a:bodyPr/>
+              <a:lstStyle/>
+              <a:p>
+                <a:endParaRPr lang="en-IN"/>
+              </a:p>
+            </p:txBody>
           </p:sp>
           <p:sp>
             <p:nvSpPr>
@@ -12378,7 +12813,7 @@
               </a:ln>
               <a:extLst>
                 <a:ext uri="{91240B29-F687-4f45-9708-019B960494DF}">
-                  <a14:hiddenLine xmlns="" xmlns:a14="http://schemas.microsoft.com/office/drawing/2010/main" w="9525">
+                  <a14:hiddenLine xmlns:a14="http://schemas.microsoft.com/office/drawing/2010/main" xmlns="" w="9525">
                     <a:solidFill>
                       <a:srgbClr val="000000"/>
                     </a:solidFill>
@@ -12389,6 +12824,13 @@
                 </a:ext>
               </a:extLst>
             </p:spPr>
+            <p:txBody>
+              <a:bodyPr/>
+              <a:lstStyle/>
+              <a:p>
+                <a:endParaRPr lang="en-IN"/>
+              </a:p>
+            </p:txBody>
           </p:sp>
           <p:sp>
             <p:nvSpPr>
@@ -12440,7 +12882,7 @@
               </a:ln>
               <a:extLst>
                 <a:ext uri="{91240B29-F687-4f45-9708-019B960494DF}">
-                  <a14:hiddenLine xmlns="" xmlns:a14="http://schemas.microsoft.com/office/drawing/2010/main" w="9525">
+                  <a14:hiddenLine xmlns:a14="http://schemas.microsoft.com/office/drawing/2010/main" xmlns="" w="9525">
                     <a:solidFill>
                       <a:srgbClr val="000000"/>
                     </a:solidFill>
@@ -12451,6 +12893,13 @@
                 </a:ext>
               </a:extLst>
             </p:spPr>
+            <p:txBody>
+              <a:bodyPr/>
+              <a:lstStyle/>
+              <a:p>
+                <a:endParaRPr lang="en-IN"/>
+              </a:p>
+            </p:txBody>
           </p:sp>
           <p:sp>
             <p:nvSpPr>
@@ -12502,7 +12951,7 @@
               </a:ln>
               <a:extLst>
                 <a:ext uri="{91240B29-F687-4f45-9708-019B960494DF}">
-                  <a14:hiddenLine xmlns="" xmlns:a14="http://schemas.microsoft.com/office/drawing/2010/main" w="9525">
+                  <a14:hiddenLine xmlns:a14="http://schemas.microsoft.com/office/drawing/2010/main" xmlns="" w="9525">
                     <a:solidFill>
                       <a:srgbClr val="000000"/>
                     </a:solidFill>
@@ -12513,6 +12962,13 @@
                 </a:ext>
               </a:extLst>
             </p:spPr>
+            <p:txBody>
+              <a:bodyPr/>
+              <a:lstStyle/>
+              <a:p>
+                <a:endParaRPr lang="en-IN"/>
+              </a:p>
+            </p:txBody>
           </p:sp>
           <p:sp>
             <p:nvSpPr>
@@ -12592,7 +13048,7 @@
               </a:ln>
               <a:extLst>
                 <a:ext uri="{91240B29-F687-4f45-9708-019B960494DF}">
-                  <a14:hiddenLine xmlns="" xmlns:a14="http://schemas.microsoft.com/office/drawing/2010/main" w="9525">
+                  <a14:hiddenLine xmlns:a14="http://schemas.microsoft.com/office/drawing/2010/main" xmlns="" w="9525">
                     <a:solidFill>
                       <a:srgbClr val="000000"/>
                     </a:solidFill>
@@ -12603,6 +13059,13 @@
                 </a:ext>
               </a:extLst>
             </p:spPr>
+            <p:txBody>
+              <a:bodyPr/>
+              <a:lstStyle/>
+              <a:p>
+                <a:endParaRPr lang="en-IN"/>
+              </a:p>
+            </p:txBody>
           </p:sp>
           <p:sp>
             <p:nvSpPr>
@@ -12682,7 +13145,7 @@
               </a:ln>
               <a:extLst>
                 <a:ext uri="{91240B29-F687-4f45-9708-019B960494DF}">
-                  <a14:hiddenLine xmlns="" xmlns:a14="http://schemas.microsoft.com/office/drawing/2010/main" w="9525">
+                  <a14:hiddenLine xmlns:a14="http://schemas.microsoft.com/office/drawing/2010/main" xmlns="" w="9525">
                     <a:solidFill>
                       <a:srgbClr val="000000"/>
                     </a:solidFill>
@@ -12693,6 +13156,13 @@
                 </a:ext>
               </a:extLst>
             </p:spPr>
+            <p:txBody>
+              <a:bodyPr/>
+              <a:lstStyle/>
+              <a:p>
+                <a:endParaRPr lang="en-IN"/>
+              </a:p>
+            </p:txBody>
           </p:sp>
           <p:sp>
             <p:nvSpPr>
@@ -12744,7 +13214,7 @@
               </a:ln>
               <a:extLst>
                 <a:ext uri="{91240B29-F687-4f45-9708-019B960494DF}">
-                  <a14:hiddenLine xmlns="" xmlns:a14="http://schemas.microsoft.com/office/drawing/2010/main" w="9525">
+                  <a14:hiddenLine xmlns:a14="http://schemas.microsoft.com/office/drawing/2010/main" xmlns="" w="9525">
                     <a:solidFill>
                       <a:srgbClr val="000000"/>
                     </a:solidFill>
@@ -12755,6 +13225,13 @@
                 </a:ext>
               </a:extLst>
             </p:spPr>
+            <p:txBody>
+              <a:bodyPr/>
+              <a:lstStyle/>
+              <a:p>
+                <a:endParaRPr lang="en-IN"/>
+              </a:p>
+            </p:txBody>
           </p:sp>
           <p:sp>
             <p:nvSpPr>
@@ -12854,7 +13331,7 @@
               </a:ln>
               <a:extLst>
                 <a:ext uri="{91240B29-F687-4f45-9708-019B960494DF}">
-                  <a14:hiddenLine xmlns="" xmlns:a14="http://schemas.microsoft.com/office/drawing/2010/main" w="9525">
+                  <a14:hiddenLine xmlns:a14="http://schemas.microsoft.com/office/drawing/2010/main" xmlns="" w="9525">
                     <a:solidFill>
                       <a:srgbClr val="000000"/>
                     </a:solidFill>
@@ -12865,6 +13342,13 @@
                 </a:ext>
               </a:extLst>
             </p:spPr>
+            <p:txBody>
+              <a:bodyPr/>
+              <a:lstStyle/>
+              <a:p>
+                <a:endParaRPr lang="en-IN"/>
+              </a:p>
+            </p:txBody>
           </p:sp>
           <p:sp>
             <p:nvSpPr>
@@ -12893,6 +13377,13 @@
                 <a:tailEnd/>
               </a:ln>
             </p:spPr>
+            <p:txBody>
+              <a:bodyPr/>
+              <a:lstStyle/>
+              <a:p>
+                <a:endParaRPr lang="en-IN"/>
+              </a:p>
+            </p:txBody>
           </p:sp>
           <p:sp>
             <p:nvSpPr>
@@ -12938,7 +13429,7 @@
               </a:ln>
               <a:extLst>
                 <a:ext uri="{91240B29-F687-4f45-9708-019B960494DF}">
-                  <a14:hiddenLine xmlns="" xmlns:a14="http://schemas.microsoft.com/office/drawing/2010/main" w="9525">
+                  <a14:hiddenLine xmlns:a14="http://schemas.microsoft.com/office/drawing/2010/main" xmlns="" w="9525">
                     <a:solidFill>
                       <a:srgbClr val="000000"/>
                     </a:solidFill>
@@ -12949,6 +13440,13 @@
                 </a:ext>
               </a:extLst>
             </p:spPr>
+            <p:txBody>
+              <a:bodyPr/>
+              <a:lstStyle/>
+              <a:p>
+                <a:endParaRPr lang="en-IN"/>
+              </a:p>
+            </p:txBody>
           </p:sp>
           <p:sp>
             <p:nvSpPr>
@@ -13000,7 +13498,7 @@
               </a:ln>
               <a:extLst>
                 <a:ext uri="{91240B29-F687-4f45-9708-019B960494DF}">
-                  <a14:hiddenLine xmlns="" xmlns:a14="http://schemas.microsoft.com/office/drawing/2010/main" w="9525">
+                  <a14:hiddenLine xmlns:a14="http://schemas.microsoft.com/office/drawing/2010/main" xmlns="" w="9525">
                     <a:solidFill>
                       <a:srgbClr val="000000"/>
                     </a:solidFill>
@@ -13011,6 +13509,13 @@
                 </a:ext>
               </a:extLst>
             </p:spPr>
+            <p:txBody>
+              <a:bodyPr/>
+              <a:lstStyle/>
+              <a:p>
+                <a:endParaRPr lang="en-IN"/>
+              </a:p>
+            </p:txBody>
           </p:sp>
           <p:sp>
             <p:nvSpPr>
@@ -13062,7 +13567,7 @@
               </a:ln>
               <a:extLst>
                 <a:ext uri="{91240B29-F687-4f45-9708-019B960494DF}">
-                  <a14:hiddenLine xmlns="" xmlns:a14="http://schemas.microsoft.com/office/drawing/2010/main" w="9525">
+                  <a14:hiddenLine xmlns:a14="http://schemas.microsoft.com/office/drawing/2010/main" xmlns="" w="9525">
                     <a:solidFill>
                       <a:srgbClr val="000000"/>
                     </a:solidFill>
@@ -13073,6 +13578,13 @@
                 </a:ext>
               </a:extLst>
             </p:spPr>
+            <p:txBody>
+              <a:bodyPr/>
+              <a:lstStyle/>
+              <a:p>
+                <a:endParaRPr lang="en-IN"/>
+              </a:p>
+            </p:txBody>
           </p:sp>
           <p:sp>
             <p:nvSpPr>
@@ -13152,7 +13664,7 @@
               </a:ln>
               <a:extLst>
                 <a:ext uri="{91240B29-F687-4f45-9708-019B960494DF}">
-                  <a14:hiddenLine xmlns="" xmlns:a14="http://schemas.microsoft.com/office/drawing/2010/main" w="9525">
+                  <a14:hiddenLine xmlns:a14="http://schemas.microsoft.com/office/drawing/2010/main" xmlns="" w="9525">
                     <a:solidFill>
                       <a:srgbClr val="000000"/>
                     </a:solidFill>
@@ -13163,6 +13675,13 @@
                 </a:ext>
               </a:extLst>
             </p:spPr>
+            <p:txBody>
+              <a:bodyPr/>
+              <a:lstStyle/>
+              <a:p>
+                <a:endParaRPr lang="en-IN"/>
+              </a:p>
+            </p:txBody>
           </p:sp>
           <p:sp>
             <p:nvSpPr>
@@ -13186,7 +13705,7 @@
               </a:ln>
               <a:extLst>
                 <a:ext uri="{91240B29-F687-4f45-9708-019B960494DF}">
-                  <a14:hiddenLine xmlns="" xmlns:a14="http://schemas.microsoft.com/office/drawing/2010/main" w="9525">
+                  <a14:hiddenLine xmlns:a14="http://schemas.microsoft.com/office/drawing/2010/main" xmlns="" w="9525">
                     <a:solidFill>
                       <a:srgbClr val="000000"/>
                     </a:solidFill>
@@ -13197,6 +13716,13 @@
                 </a:ext>
               </a:extLst>
             </p:spPr>
+            <p:txBody>
+              <a:bodyPr/>
+              <a:lstStyle/>
+              <a:p>
+                <a:endParaRPr lang="en-IN"/>
+              </a:p>
+            </p:txBody>
           </p:sp>
           <p:sp>
             <p:nvSpPr>
@@ -13251,7 +13777,7 @@
               </a:ln>
               <a:extLst>
                 <a:ext uri="{91240B29-F687-4f45-9708-019B960494DF}">
-                  <a14:hiddenLine xmlns="" xmlns:a14="http://schemas.microsoft.com/office/drawing/2010/main" w="9525">
+                  <a14:hiddenLine xmlns:a14="http://schemas.microsoft.com/office/drawing/2010/main" xmlns="" w="9525">
                     <a:solidFill>
                       <a:srgbClr val="000000"/>
                     </a:solidFill>
@@ -13262,6 +13788,13 @@
                 </a:ext>
               </a:extLst>
             </p:spPr>
+            <p:txBody>
+              <a:bodyPr/>
+              <a:lstStyle/>
+              <a:p>
+                <a:endParaRPr lang="en-IN"/>
+              </a:p>
+            </p:txBody>
           </p:sp>
           <p:sp>
             <p:nvSpPr>
@@ -13341,7 +13874,7 @@
               </a:ln>
               <a:extLst>
                 <a:ext uri="{91240B29-F687-4f45-9708-019B960494DF}">
-                  <a14:hiddenLine xmlns="" xmlns:a14="http://schemas.microsoft.com/office/drawing/2010/main" w="9525">
+                  <a14:hiddenLine xmlns:a14="http://schemas.microsoft.com/office/drawing/2010/main" xmlns="" w="9525">
                     <a:solidFill>
                       <a:srgbClr val="000000"/>
                     </a:solidFill>
@@ -13352,6 +13885,13 @@
                 </a:ext>
               </a:extLst>
             </p:spPr>
+            <p:txBody>
+              <a:bodyPr/>
+              <a:lstStyle/>
+              <a:p>
+                <a:endParaRPr lang="en-IN"/>
+              </a:p>
+            </p:txBody>
           </p:sp>
           <p:sp>
             <p:nvSpPr>
@@ -13403,7 +13943,7 @@
               </a:ln>
               <a:extLst>
                 <a:ext uri="{91240B29-F687-4f45-9708-019B960494DF}">
-                  <a14:hiddenLine xmlns="" xmlns:a14="http://schemas.microsoft.com/office/drawing/2010/main" w="9525">
+                  <a14:hiddenLine xmlns:a14="http://schemas.microsoft.com/office/drawing/2010/main" xmlns="" w="9525">
                     <a:solidFill>
                       <a:srgbClr val="000000"/>
                     </a:solidFill>
@@ -13414,6 +13954,13 @@
                 </a:ext>
               </a:extLst>
             </p:spPr>
+            <p:txBody>
+              <a:bodyPr/>
+              <a:lstStyle/>
+              <a:p>
+                <a:endParaRPr lang="en-IN"/>
+              </a:p>
+            </p:txBody>
           </p:sp>
           <p:sp>
             <p:nvSpPr>
@@ -13493,7 +14040,7 @@
               </a:ln>
               <a:extLst>
                 <a:ext uri="{91240B29-F687-4f45-9708-019B960494DF}">
-                  <a14:hiddenLine xmlns="" xmlns:a14="http://schemas.microsoft.com/office/drawing/2010/main" w="9525">
+                  <a14:hiddenLine xmlns:a14="http://schemas.microsoft.com/office/drawing/2010/main" xmlns="" w="9525">
                     <a:solidFill>
                       <a:srgbClr val="000000"/>
                     </a:solidFill>
@@ -13504,6 +14051,13 @@
                 </a:ext>
               </a:extLst>
             </p:spPr>
+            <p:txBody>
+              <a:bodyPr/>
+              <a:lstStyle/>
+              <a:p>
+                <a:endParaRPr lang="en-IN"/>
+              </a:p>
+            </p:txBody>
           </p:sp>
           <p:sp>
             <p:nvSpPr>
@@ -13558,7 +14112,7 @@
               </a:ln>
               <a:extLst>
                 <a:ext uri="{91240B29-F687-4f45-9708-019B960494DF}">
-                  <a14:hiddenLine xmlns="" xmlns:a14="http://schemas.microsoft.com/office/drawing/2010/main" w="9525">
+                  <a14:hiddenLine xmlns:a14="http://schemas.microsoft.com/office/drawing/2010/main" xmlns="" w="9525">
                     <a:solidFill>
                       <a:srgbClr val="000000"/>
                     </a:solidFill>
@@ -13569,6 +14123,13 @@
                 </a:ext>
               </a:extLst>
             </p:spPr>
+            <p:txBody>
+              <a:bodyPr/>
+              <a:lstStyle/>
+              <a:p>
+                <a:endParaRPr lang="en-IN"/>
+              </a:p>
+            </p:txBody>
           </p:sp>
           <p:sp>
             <p:nvSpPr>
@@ -13620,7 +14181,7 @@
               </a:ln>
               <a:extLst>
                 <a:ext uri="{91240B29-F687-4f45-9708-019B960494DF}">
-                  <a14:hiddenLine xmlns="" xmlns:a14="http://schemas.microsoft.com/office/drawing/2010/main" w="9525">
+                  <a14:hiddenLine xmlns:a14="http://schemas.microsoft.com/office/drawing/2010/main" xmlns="" w="9525">
                     <a:solidFill>
                       <a:srgbClr val="000000"/>
                     </a:solidFill>
@@ -13631,6 +14192,13 @@
                 </a:ext>
               </a:extLst>
             </p:spPr>
+            <p:txBody>
+              <a:bodyPr/>
+              <a:lstStyle/>
+              <a:p>
+                <a:endParaRPr lang="en-IN"/>
+              </a:p>
+            </p:txBody>
           </p:sp>
           <p:sp>
             <p:nvSpPr>
@@ -13710,7 +14278,7 @@
               </a:ln>
               <a:extLst>
                 <a:ext uri="{91240B29-F687-4f45-9708-019B960494DF}">
-                  <a14:hiddenLine xmlns="" xmlns:a14="http://schemas.microsoft.com/office/drawing/2010/main" w="9525">
+                  <a14:hiddenLine xmlns:a14="http://schemas.microsoft.com/office/drawing/2010/main" xmlns="" w="9525">
                     <a:solidFill>
                       <a:srgbClr val="000000"/>
                     </a:solidFill>
@@ -13721,6 +14289,13 @@
                 </a:ext>
               </a:extLst>
             </p:spPr>
+            <p:txBody>
+              <a:bodyPr/>
+              <a:lstStyle/>
+              <a:p>
+                <a:endParaRPr lang="en-IN"/>
+              </a:p>
+            </p:txBody>
           </p:sp>
           <p:sp>
             <p:nvSpPr>
@@ -13800,7 +14375,7 @@
               </a:ln>
               <a:extLst>
                 <a:ext uri="{91240B29-F687-4f45-9708-019B960494DF}">
-                  <a14:hiddenLine xmlns="" xmlns:a14="http://schemas.microsoft.com/office/drawing/2010/main" w="9525">
+                  <a14:hiddenLine xmlns:a14="http://schemas.microsoft.com/office/drawing/2010/main" xmlns="" w="9525">
                     <a:solidFill>
                       <a:srgbClr val="000000"/>
                     </a:solidFill>
@@ -13811,6 +14386,13 @@
                 </a:ext>
               </a:extLst>
             </p:spPr>
+            <p:txBody>
+              <a:bodyPr/>
+              <a:lstStyle/>
+              <a:p>
+                <a:endParaRPr lang="en-IN"/>
+              </a:p>
+            </p:txBody>
           </p:sp>
           <p:sp>
             <p:nvSpPr>
@@ -13865,7 +14447,7 @@
               </a:ln>
               <a:extLst>
                 <a:ext uri="{91240B29-F687-4f45-9708-019B960494DF}">
-                  <a14:hiddenLine xmlns="" xmlns:a14="http://schemas.microsoft.com/office/drawing/2010/main" w="9525">
+                  <a14:hiddenLine xmlns:a14="http://schemas.microsoft.com/office/drawing/2010/main" xmlns="" w="9525">
                     <a:solidFill>
                       <a:srgbClr val="000000"/>
                     </a:solidFill>
@@ -13876,6 +14458,13 @@
                 </a:ext>
               </a:extLst>
             </p:spPr>
+            <p:txBody>
+              <a:bodyPr/>
+              <a:lstStyle/>
+              <a:p>
+                <a:endParaRPr lang="en-IN"/>
+              </a:p>
+            </p:txBody>
           </p:sp>
           <p:sp>
             <p:nvSpPr>
@@ -13985,7 +14574,7 @@
               </a:ln>
               <a:extLst>
                 <a:ext uri="{91240B29-F687-4f45-9708-019B960494DF}">
-                  <a14:hiddenLine xmlns="" xmlns:a14="http://schemas.microsoft.com/office/drawing/2010/main" w="9525">
+                  <a14:hiddenLine xmlns:a14="http://schemas.microsoft.com/office/drawing/2010/main" xmlns="" w="9525">
                     <a:solidFill>
                       <a:srgbClr val="000000"/>
                     </a:solidFill>
@@ -13996,6 +14585,13 @@
                 </a:ext>
               </a:extLst>
             </p:spPr>
+            <p:txBody>
+              <a:bodyPr/>
+              <a:lstStyle/>
+              <a:p>
+                <a:endParaRPr lang="en-IN"/>
+              </a:p>
+            </p:txBody>
           </p:sp>
         </p:grpSp>
         <p:grpSp>
@@ -14083,7 +14679,7 @@
               </a:ln>
               <a:extLst>
                 <a:ext uri="{91240B29-F687-4f45-9708-019B960494DF}">
-                  <a14:hiddenLine xmlns="" xmlns:a14="http://schemas.microsoft.com/office/drawing/2010/main" w="9525">
+                  <a14:hiddenLine xmlns:a14="http://schemas.microsoft.com/office/drawing/2010/main" xmlns="" w="9525">
                     <a:solidFill>
                       <a:srgbClr val="000000"/>
                     </a:solidFill>
@@ -14094,6 +14690,13 @@
                 </a:ext>
               </a:extLst>
             </p:spPr>
+            <p:txBody>
+              <a:bodyPr/>
+              <a:lstStyle/>
+              <a:p>
+                <a:endParaRPr lang="en-IN"/>
+              </a:p>
+            </p:txBody>
           </p:sp>
           <p:sp>
             <p:nvSpPr>
@@ -14198,7 +14801,7 @@
               </a:ln>
               <a:extLst>
                 <a:ext uri="{91240B29-F687-4f45-9708-019B960494DF}">
-                  <a14:hiddenLine xmlns="" xmlns:a14="http://schemas.microsoft.com/office/drawing/2010/main" w="9525">
+                  <a14:hiddenLine xmlns:a14="http://schemas.microsoft.com/office/drawing/2010/main" xmlns="" w="9525">
                     <a:solidFill>
                       <a:srgbClr val="000000"/>
                     </a:solidFill>
@@ -14209,6 +14812,13 @@
                 </a:ext>
               </a:extLst>
             </p:spPr>
+            <p:txBody>
+              <a:bodyPr/>
+              <a:lstStyle/>
+              <a:p>
+                <a:endParaRPr lang="en-IN"/>
+              </a:p>
+            </p:txBody>
           </p:sp>
           <p:sp>
             <p:nvSpPr>
@@ -14288,7 +14898,7 @@
               </a:ln>
               <a:extLst>
                 <a:ext uri="{91240B29-F687-4f45-9708-019B960494DF}">
-                  <a14:hiddenLine xmlns="" xmlns:a14="http://schemas.microsoft.com/office/drawing/2010/main" w="9525">
+                  <a14:hiddenLine xmlns:a14="http://schemas.microsoft.com/office/drawing/2010/main" xmlns="" w="9525">
                     <a:solidFill>
                       <a:srgbClr val="000000"/>
                     </a:solidFill>
@@ -14299,6 +14909,13 @@
                 </a:ext>
               </a:extLst>
             </p:spPr>
+            <p:txBody>
+              <a:bodyPr/>
+              <a:lstStyle/>
+              <a:p>
+                <a:endParaRPr lang="en-IN"/>
+              </a:p>
+            </p:txBody>
           </p:sp>
           <p:sp>
             <p:nvSpPr>
@@ -14353,7 +14970,7 @@
               </a:ln>
               <a:extLst>
                 <a:ext uri="{91240B29-F687-4f45-9708-019B960494DF}">
-                  <a14:hiddenLine xmlns="" xmlns:a14="http://schemas.microsoft.com/office/drawing/2010/main" w="9525">
+                  <a14:hiddenLine xmlns:a14="http://schemas.microsoft.com/office/drawing/2010/main" xmlns="" w="9525">
                     <a:solidFill>
                       <a:srgbClr val="000000"/>
                     </a:solidFill>
@@ -14364,6 +14981,13 @@
                 </a:ext>
               </a:extLst>
             </p:spPr>
+            <p:txBody>
+              <a:bodyPr/>
+              <a:lstStyle/>
+              <a:p>
+                <a:endParaRPr lang="en-IN"/>
+              </a:p>
+            </p:txBody>
           </p:sp>
           <p:sp>
             <p:nvSpPr>
@@ -14443,7 +15067,7 @@
               </a:ln>
               <a:extLst>
                 <a:ext uri="{91240B29-F687-4f45-9708-019B960494DF}">
-                  <a14:hiddenLine xmlns="" xmlns:a14="http://schemas.microsoft.com/office/drawing/2010/main" w="9525">
+                  <a14:hiddenLine xmlns:a14="http://schemas.microsoft.com/office/drawing/2010/main" xmlns="" w="9525">
                     <a:solidFill>
                       <a:srgbClr val="000000"/>
                     </a:solidFill>
@@ -14454,6 +15078,13 @@
                 </a:ext>
               </a:extLst>
             </p:spPr>
+            <p:txBody>
+              <a:bodyPr/>
+              <a:lstStyle/>
+              <a:p>
+                <a:endParaRPr lang="en-IN"/>
+              </a:p>
+            </p:txBody>
           </p:sp>
           <p:sp>
             <p:nvSpPr>
@@ -14511,7 +15142,7 @@
               </a:ln>
               <a:extLst>
                 <a:ext uri="{91240B29-F687-4f45-9708-019B960494DF}">
-                  <a14:hiddenLine xmlns="" xmlns:a14="http://schemas.microsoft.com/office/drawing/2010/main" w="9525">
+                  <a14:hiddenLine xmlns:a14="http://schemas.microsoft.com/office/drawing/2010/main" xmlns="" w="9525">
                     <a:solidFill>
                       <a:srgbClr val="000000"/>
                     </a:solidFill>
@@ -14522,6 +15153,13 @@
                 </a:ext>
               </a:extLst>
             </p:spPr>
+            <p:txBody>
+              <a:bodyPr/>
+              <a:lstStyle/>
+              <a:p>
+                <a:endParaRPr lang="en-IN"/>
+              </a:p>
+            </p:txBody>
           </p:sp>
           <p:sp>
             <p:nvSpPr>
@@ -14601,7 +15239,7 @@
               </a:ln>
               <a:extLst>
                 <a:ext uri="{91240B29-F687-4f45-9708-019B960494DF}">
-                  <a14:hiddenLine xmlns="" xmlns:a14="http://schemas.microsoft.com/office/drawing/2010/main" w="9525">
+                  <a14:hiddenLine xmlns:a14="http://schemas.microsoft.com/office/drawing/2010/main" xmlns="" w="9525">
                     <a:solidFill>
                       <a:srgbClr val="000000"/>
                     </a:solidFill>
@@ -14612,6 +15250,13 @@
                 </a:ext>
               </a:extLst>
             </p:spPr>
+            <p:txBody>
+              <a:bodyPr/>
+              <a:lstStyle/>
+              <a:p>
+                <a:endParaRPr lang="en-IN"/>
+              </a:p>
+            </p:txBody>
           </p:sp>
           <p:sp>
             <p:nvSpPr>
@@ -14669,7 +15314,7 @@
               </a:ln>
               <a:extLst>
                 <a:ext uri="{91240B29-F687-4f45-9708-019B960494DF}">
-                  <a14:hiddenLine xmlns="" xmlns:a14="http://schemas.microsoft.com/office/drawing/2010/main" w="9525">
+                  <a14:hiddenLine xmlns:a14="http://schemas.microsoft.com/office/drawing/2010/main" xmlns="" w="9525">
                     <a:solidFill>
                       <a:srgbClr val="000000"/>
                     </a:solidFill>
@@ -14680,6 +15325,13 @@
                 </a:ext>
               </a:extLst>
             </p:spPr>
+            <p:txBody>
+              <a:bodyPr/>
+              <a:lstStyle/>
+              <a:p>
+                <a:endParaRPr lang="en-IN"/>
+              </a:p>
+            </p:txBody>
           </p:sp>
           <p:sp>
             <p:nvSpPr>
@@ -14759,7 +15411,7 @@
               </a:ln>
               <a:extLst>
                 <a:ext uri="{91240B29-F687-4f45-9708-019B960494DF}">
-                  <a14:hiddenLine xmlns="" xmlns:a14="http://schemas.microsoft.com/office/drawing/2010/main" w="9525">
+                  <a14:hiddenLine xmlns:a14="http://schemas.microsoft.com/office/drawing/2010/main" xmlns="" w="9525">
                     <a:solidFill>
                       <a:srgbClr val="000000"/>
                     </a:solidFill>
@@ -14770,6 +15422,13 @@
                 </a:ext>
               </a:extLst>
             </p:spPr>
+            <p:txBody>
+              <a:bodyPr/>
+              <a:lstStyle/>
+              <a:p>
+                <a:endParaRPr lang="en-IN"/>
+              </a:p>
+            </p:txBody>
           </p:sp>
           <p:sp>
             <p:nvSpPr>
@@ -14793,7 +15452,7 @@
               </a:ln>
               <a:extLst>
                 <a:ext uri="{91240B29-F687-4f45-9708-019B960494DF}">
-                  <a14:hiddenLine xmlns="" xmlns:a14="http://schemas.microsoft.com/office/drawing/2010/main" w="9525">
+                  <a14:hiddenLine xmlns:a14="http://schemas.microsoft.com/office/drawing/2010/main" xmlns="" w="9525">
                     <a:solidFill>
                       <a:srgbClr val="000000"/>
                     </a:solidFill>
@@ -14804,6 +15463,13 @@
                 </a:ext>
               </a:extLst>
             </p:spPr>
+            <p:txBody>
+              <a:bodyPr/>
+              <a:lstStyle/>
+              <a:p>
+                <a:endParaRPr lang="en-IN"/>
+              </a:p>
+            </p:txBody>
           </p:sp>
         </p:grpSp>
       </p:grpSp>
@@ -14933,7 +15599,7 @@
           <a:p>
             <a:fld id="{5BCAD085-E8A6-8845-BD4E-CB4CCA059FC4}" type="datetimeFigureOut">
               <a:rPr lang="en-US" smtClean="0"/>
-              <a:t>7/21/2025</a:t>
+              <a:t>4/22/2026</a:t>
             </a:fld>
             <a:endParaRPr lang="en-US"/>
           </a:p>
@@ -15393,13 +16059,10 @@
           <a:p>
             <a:r>
               <a:rPr dirty="0"/>
-              <a:t>Java Development Kit Setup </a:t>
+              <a:t>Java Development Kit Setup for Beginners</a:t>
             </a:r>
             <a:r>
-              <a:t>for Beginners</a:t>
-            </a:r>
-            <a:r>
-              <a:rPr lang="en-US"/>
+              <a:rPr lang="en-US" dirty="0"/>
               <a:t>(Topic 1)</a:t>
             </a:r>
             <a:endParaRPr dirty="0"/>
@@ -15418,28 +16081,6 @@
               <a:t>|</a:t>
             </a:r>
             <a:endParaRPr lang="en-US" dirty="0"/>
-          </a:p>
-          <a:p>
-            <a:r>
-              <a:rPr dirty="0"/>
-              <a:t> Date</a:t>
-            </a:r>
-            <a:r>
-              <a:rPr lang="en-US" dirty="0"/>
-              <a:t> </a:t>
-            </a:r>
-            <a:r>
-              <a:rPr dirty="0"/>
-              <a:t>:</a:t>
-            </a:r>
-            <a:r>
-              <a:rPr lang="en-US" dirty="0"/>
-              <a:t> 21</a:t>
-            </a:r>
-            <a:r>
-              <a:rPr dirty="0"/>
-              <a:t> July 2025</a:t>
-            </a:r>
           </a:p>
         </p:txBody>
       </p:sp>
